--- a/slides/ARC3133_Class15.pptx
+++ b/slides/ARC3133_Class15.pptx
@@ -7087,7 +7087,7 @@
                 </a:solidFill>
                 <a:latin typeface="Arial"/>
               </a:rPr>
-              <a:t>DUE AT THE FINAL REVIEW · DECEMBER 10–16, 2026; EXACT REVIEW SLOT TO BE CONFIRMED   /   11%</a:t>
+              <a:t>DUE AT THE FINAL REVIEW · DECEMBER 10–16, 2026; EXACT REVIEW SLOT TO BE CONFIRMED   /   18%</a:t>
             </a:r>
           </a:p>
         </p:txBody>
@@ -9985,7 +9985,7 @@
                 </a:solidFill>
                 <a:latin typeface="Calibri"/>
               </a:rPr>
-              <a:t>The files that made the physical work: the P2b print file, the P3c plot file and the final P4b cutting file.</a:t>
+              <a:t>The files that made the physical work: the P2b print file, the P3c SVG and the final P4b cutting file.</a:t>
             </a:r>
           </a:p>
         </p:txBody>
